--- a/decks/hist-civil-rights/hist-civil-rights_ch5_selma.pptx
+++ b/decks/hist-civil-rights/hist-civil-rights_ch5_selma.pptx
@@ -128,29 +128,29 @@
   <p:extLst>
     <p:ext uri="{521415D9-36F7-43E2-AB2F-B90AF26B5E84}">
       <p14:sectionLst xmlns:p14="http://schemas.microsoft.com/office/powerpoint/2010/main">
-        <p14:section name="Opening" id="{1a433010-8fd6-b6ce-fff3-9331201765d1}">
+        <p14:section name="Opening" id="{d214ea1a-6aaf-ccba-08ee-04ceb9d73c5e}">
           <p14:sldIdLst>
             <p14:sldId id="256"/>
           </p14:sldIdLst>
         </p14:section>
-        <p14:section name="Gate" id="{945c1ef5-ee71-231f-f110-6ee57b6585f0}">
+        <p14:section name="Gate" id="{3e647370-3164-3eb0-eb82-eb5c8a3d8f8a}">
           <p14:sldIdLst>
             <p14:sldId id="257"/>
             <p14:sldId id="258"/>
           </p14:sldIdLst>
         </p14:section>
-        <p14:section name="Pre-teach" id="{79c069d3-727d-88a4-309e-712629b702c9}">
+        <p14:section name="Pre-teach" id="{57fb7e34-997f-a3de-57df-3015f08f3595}">
           <p14:sldIdLst>
             <p14:sldId id="259"/>
           </p14:sldIdLst>
         </p14:section>
-        <p14:section name="Read-along" id="{aeeaf61a-6a5f-f563-f43e-f2e7e48bb0a1}">
+        <p14:section name="Read-along" id="{2fe8fec5-8cd7-d599-5561-7a25749b11b8}">
           <p14:sldIdLst>
             <p14:sldId id="260"/>
             <p14:sldId id="261"/>
           </p14:sldIdLst>
         </p14:section>
-        <p14:section name="Teach" id="{afdaf5d2-685c-3324-de79-69c9af4052e3}">
+        <p14:section name="Teach" id="{4249434c-eb6f-e1a9-1eed-46931872dac7}">
           <p14:sldIdLst>
             <p14:sldId id="262"/>
             <p14:sldId id="263"/>
@@ -160,7 +160,7 @@
             <p14:sldId id="267"/>
           </p14:sldIdLst>
         </p14:section>
-        <p14:section name="Routes" id="{231c29d7-b40b-4848-2b64-031c2214b408}">
+        <p14:section name="Routes" id="{4806a61c-7b4f-a5f4-c9c3-7eebde63a81b}">
           <p14:sldIdLst>
             <p14:sldId id="268"/>
             <p14:sldId id="269"/>
@@ -169,12 +169,12 @@
             <p14:sldId id="272"/>
           </p14:sldIdLst>
         </p14:section>
-        <p14:section name="Close" id="{569d0c81-6c21-1ddf-24e5-3906698dcd8e}">
+        <p14:section name="Close" id="{8fdf93a0-d509-783f-6b1c-ade8e591000f}">
           <p14:sldIdLst>
             <p14:sldId id="273"/>
           </p14:sldIdLst>
         </p14:section>
-        <p14:section name="Answers" id="{f55472e7-bc7d-1a34-9bcd-d118cfd37723}">
+        <p14:section name="Answers" id="{5c47318d-b54d-446e-7a5d-d58ff82b340d}">
           <p14:sldIdLst>
             <p14:sldId id="274"/>
             <p14:sldId id="275"/>
@@ -863,7 +863,7 @@
             <a:r>
               <a:rPr lang="en-US" dirty="0"/>
               <a:t>Teach — The Voting Rights Act, and what the President told Congress. Say it in your own words, then check understanding with a quick question: ask a pupil from the pre-teach group first, since they met these words and ideas before the lesson. Pupils try to recall before you re-explain.
-A week after Bloody Sunday, President Johnson introduced the Voting Rights Act to Congress and gave a speech demanding that Congress pass the law. Congress passed the Voting Rights Act in 1965.
+A week after Bloody Sunday, President Johnson put the Voting Rights Act before Congress and spoke in person to press for its passing. Congress passed the Voting Rights Act in 1965.
 Johnson's speech of 15 March 1965 is in copyright, so it is not quoted here; his argument, in other words, was this. What had happened at Selma, he told Congress, was part of a much larger movement reaching into every part of the country. It was the effort of Black Americans to secure for themselves everything American life promised, and their cause had to be the whole nation's cause, because it was not only Black Americans but all Americans who had to get past a long history of prejudice and injustice that still held the country back. He finished by borrowing the movement's own anthem of determination.
 Your lesson asks you to notice who he was speaking to and what he was doing. By presenting voting rights as everyone's problem rather than a Black problem, the President was making it harder for members of Congress to treat it as somebody else's business. That a president was making the movement's argument for it, in those words, is itself a measure of how much the march at Selma had achieved.
 Tip: When a politician widens a cause from one group to everybody, ask what that does to the people listening. It is usually a move to make opposition awkward.</a:t>
@@ -5801,7 +5801,7 @@
                 <a:ea typeface="Calibri" pitchFamily="34" charset="-122"/>
                 <a:cs typeface="Calibri" pitchFamily="34" charset="-120"/>
               </a:rPr>
-              <a:t>A week after Bloody Sunday, President Johnson introduced the Voting Rights Act to Congress and gave a speech demanding that Congress pass the law.</a:t>
+              <a:t>A week after Bloody Sunday, President Johnson put the Voting Rights Act before Congress and spoke in person to press for its passing.</a:t>
             </a:r>
             <a:endParaRPr lang="en-US" sz="2200" dirty="0"/>
           </a:p>
